--- a/public/videos/repositories/local-board-plus/local-board-plus-tech-preview.pptx
+++ b/public/videos/repositories/local-board-plus/local-board-plus-tech-preview.pptx
@@ -134,7 +134,7 @@
           <p:cNvPr id="2" name="タイトル 1">
             <a:extLst>
               <a:ext uri="{FF2B5EF4-FFF2-40B4-BE49-F238E27FC236}">
-                <a16:creationId xmlns:a16="http://schemas.microsoft.com/office/drawing/2014/main" id="{92A245C5-6CFE-53B3-3434-4E03CA09A7A3}"/>
+                <a16:creationId xmlns:a16="http://schemas.microsoft.com/office/drawing/2014/main" id="{1475945E-70F4-9941-86BA-2F5D74521891}"/>
               </a:ext>
             </a:extLst>
           </p:cNvPr>
@@ -171,7 +171,7 @@
           <p:cNvPr id="3" name="字幕 2">
             <a:extLst>
               <a:ext uri="{FF2B5EF4-FFF2-40B4-BE49-F238E27FC236}">
-                <a16:creationId xmlns:a16="http://schemas.microsoft.com/office/drawing/2014/main" id="{DDD23059-9DD0-6471-221D-7390E9FCA55E}"/>
+                <a16:creationId xmlns:a16="http://schemas.microsoft.com/office/drawing/2014/main" id="{F5571C01-73F4-C589-2F67-5D2D09794AA7}"/>
               </a:ext>
             </a:extLst>
           </p:cNvPr>
@@ -241,7 +241,7 @@
           <p:cNvPr id="4" name="日付プレースホルダー 3">
             <a:extLst>
               <a:ext uri="{FF2B5EF4-FFF2-40B4-BE49-F238E27FC236}">
-                <a16:creationId xmlns:a16="http://schemas.microsoft.com/office/drawing/2014/main" id="{7FB0A394-4483-F1B7-5875-05ECA4554BCA}"/>
+                <a16:creationId xmlns:a16="http://schemas.microsoft.com/office/drawing/2014/main" id="{6BBC2EB3-3961-4040-F4C5-C95EC44CBD0D}"/>
               </a:ext>
             </a:extLst>
           </p:cNvPr>
@@ -257,7 +257,7 @@
           <a:bodyPr/>
           <a:lstStyle/>
           <a:p>
-            <a:fld id="{1A6D1CB6-AAB3-48C3-A5E2-EE61602A8FD4}" type="datetimeFigureOut">
+            <a:fld id="{C6312477-18C9-4D6B-8390-793B6E30CE9F}" type="datetimeFigureOut">
               <a:rPr kumimoji="1" lang="ja-JP" altLang="en-US" smtClean="0"/>
               <a:t>2026/7/30</a:t>
             </a:fld>
@@ -270,7 +270,7 @@
           <p:cNvPr id="5" name="フッター プレースホルダー 4">
             <a:extLst>
               <a:ext uri="{FF2B5EF4-FFF2-40B4-BE49-F238E27FC236}">
-                <a16:creationId xmlns:a16="http://schemas.microsoft.com/office/drawing/2014/main" id="{5008DE1C-B5F6-D2E2-D894-7C3E9C1B40EF}"/>
+                <a16:creationId xmlns:a16="http://schemas.microsoft.com/office/drawing/2014/main" id="{34A74AAB-8807-E224-2D91-BB08C1AEB2B3}"/>
               </a:ext>
             </a:extLst>
           </p:cNvPr>
@@ -295,7 +295,7 @@
           <p:cNvPr id="6" name="スライド番号プレースホルダー 5">
             <a:extLst>
               <a:ext uri="{FF2B5EF4-FFF2-40B4-BE49-F238E27FC236}">
-                <a16:creationId xmlns:a16="http://schemas.microsoft.com/office/drawing/2014/main" id="{973F4247-B619-7392-2221-1A20BBC8157C}"/>
+                <a16:creationId xmlns:a16="http://schemas.microsoft.com/office/drawing/2014/main" id="{1C4685EB-0DE3-3744-1D6A-671648503EA8}"/>
               </a:ext>
             </a:extLst>
           </p:cNvPr>
@@ -311,7 +311,7 @@
           <a:bodyPr/>
           <a:lstStyle/>
           <a:p>
-            <a:fld id="{09F59FD9-8A91-4C3A-8EB7-1DDE47E02B28}" type="slidenum">
+            <a:fld id="{720DFA25-211F-4ACA-A38F-6EDDE1834855}" type="slidenum">
               <a:rPr kumimoji="1" lang="ja-JP" altLang="en-US" smtClean="0"/>
               <a:t>‹#›</a:t>
             </a:fld>
@@ -322,7 +322,7 @@
     </p:spTree>
     <p:extLst>
       <p:ext uri="{BB962C8B-B14F-4D97-AF65-F5344CB8AC3E}">
-        <p14:creationId xmlns:p14="http://schemas.microsoft.com/office/powerpoint/2010/main" val="1502479254"/>
+        <p14:creationId xmlns:p14="http://schemas.microsoft.com/office/powerpoint/2010/main" val="119709398"/>
       </p:ext>
     </p:extLst>
   </p:cSld>
@@ -354,7 +354,7 @@
           <p:cNvPr id="2" name="タイトル 1">
             <a:extLst>
               <a:ext uri="{FF2B5EF4-FFF2-40B4-BE49-F238E27FC236}">
-                <a16:creationId xmlns:a16="http://schemas.microsoft.com/office/drawing/2014/main" id="{585B45B3-D21B-E33B-115D-A22D0637A367}"/>
+                <a16:creationId xmlns:a16="http://schemas.microsoft.com/office/drawing/2014/main" id="{AE440791-5425-9A09-8AB1-385262B6C8DC}"/>
               </a:ext>
             </a:extLst>
           </p:cNvPr>
@@ -382,7 +382,7 @@
           <p:cNvPr id="3" name="縦書きテキスト プレースホルダー 2">
             <a:extLst>
               <a:ext uri="{FF2B5EF4-FFF2-40B4-BE49-F238E27FC236}">
-                <a16:creationId xmlns:a16="http://schemas.microsoft.com/office/drawing/2014/main" id="{BF17FF6E-F169-C4AD-E12F-B39D6E4AA656}"/>
+                <a16:creationId xmlns:a16="http://schemas.microsoft.com/office/drawing/2014/main" id="{FD16851D-7BB2-83A3-4114-E2D67BFF84CB}"/>
               </a:ext>
             </a:extLst>
           </p:cNvPr>
@@ -471,7 +471,7 @@
           <p:cNvPr id="4" name="日付プレースホルダー 3">
             <a:extLst>
               <a:ext uri="{FF2B5EF4-FFF2-40B4-BE49-F238E27FC236}">
-                <a16:creationId xmlns:a16="http://schemas.microsoft.com/office/drawing/2014/main" id="{F3A9EEE6-0C3A-45E6-352A-B0EEC009ADCA}"/>
+                <a16:creationId xmlns:a16="http://schemas.microsoft.com/office/drawing/2014/main" id="{A571161E-B5ED-A00F-44F1-3E2EFC9B1AD7}"/>
               </a:ext>
             </a:extLst>
           </p:cNvPr>
@@ -487,7 +487,7 @@
           <a:bodyPr/>
           <a:lstStyle/>
           <a:p>
-            <a:fld id="{1A6D1CB6-AAB3-48C3-A5E2-EE61602A8FD4}" type="datetimeFigureOut">
+            <a:fld id="{C6312477-18C9-4D6B-8390-793B6E30CE9F}" type="datetimeFigureOut">
               <a:rPr kumimoji="1" lang="ja-JP" altLang="en-US" smtClean="0"/>
               <a:t>2026/7/30</a:t>
             </a:fld>
@@ -500,7 +500,7 @@
           <p:cNvPr id="5" name="フッター プレースホルダー 4">
             <a:extLst>
               <a:ext uri="{FF2B5EF4-FFF2-40B4-BE49-F238E27FC236}">
-                <a16:creationId xmlns:a16="http://schemas.microsoft.com/office/drawing/2014/main" id="{753D04D6-C590-439C-D8AD-5F0CA1B93FE8}"/>
+                <a16:creationId xmlns:a16="http://schemas.microsoft.com/office/drawing/2014/main" id="{049D9D39-91EE-E121-C9EA-24B4F1009A27}"/>
               </a:ext>
             </a:extLst>
           </p:cNvPr>
@@ -525,7 +525,7 @@
           <p:cNvPr id="6" name="スライド番号プレースホルダー 5">
             <a:extLst>
               <a:ext uri="{FF2B5EF4-FFF2-40B4-BE49-F238E27FC236}">
-                <a16:creationId xmlns:a16="http://schemas.microsoft.com/office/drawing/2014/main" id="{D4145A29-8AAD-0095-735B-56ABD8CCFB54}"/>
+                <a16:creationId xmlns:a16="http://schemas.microsoft.com/office/drawing/2014/main" id="{11985B03-D838-2C8B-A074-7C9E02064E67}"/>
               </a:ext>
             </a:extLst>
           </p:cNvPr>
@@ -541,7 +541,7 @@
           <a:bodyPr/>
           <a:lstStyle/>
           <a:p>
-            <a:fld id="{09F59FD9-8A91-4C3A-8EB7-1DDE47E02B28}" type="slidenum">
+            <a:fld id="{720DFA25-211F-4ACA-A38F-6EDDE1834855}" type="slidenum">
               <a:rPr kumimoji="1" lang="ja-JP" altLang="en-US" smtClean="0"/>
               <a:t>‹#›</a:t>
             </a:fld>
@@ -552,7 +552,7 @@
     </p:spTree>
     <p:extLst>
       <p:ext uri="{BB962C8B-B14F-4D97-AF65-F5344CB8AC3E}">
-        <p14:creationId xmlns:p14="http://schemas.microsoft.com/office/powerpoint/2010/main" val="4267851225"/>
+        <p14:creationId xmlns:p14="http://schemas.microsoft.com/office/powerpoint/2010/main" val="3717150940"/>
       </p:ext>
     </p:extLst>
   </p:cSld>
@@ -584,7 +584,7 @@
           <p:cNvPr id="2" name="縦書きタイトル 1">
             <a:extLst>
               <a:ext uri="{FF2B5EF4-FFF2-40B4-BE49-F238E27FC236}">
-                <a16:creationId xmlns:a16="http://schemas.microsoft.com/office/drawing/2014/main" id="{836898D8-0B54-41B5-CA23-E366B659BBB3}"/>
+                <a16:creationId xmlns:a16="http://schemas.microsoft.com/office/drawing/2014/main" id="{D0A1E191-7FC7-FD52-4EF1-30B44B5EA5A9}"/>
               </a:ext>
             </a:extLst>
           </p:cNvPr>
@@ -617,7 +617,7 @@
           <p:cNvPr id="3" name="縦書きテキスト プレースホルダー 2">
             <a:extLst>
               <a:ext uri="{FF2B5EF4-FFF2-40B4-BE49-F238E27FC236}">
-                <a16:creationId xmlns:a16="http://schemas.microsoft.com/office/drawing/2014/main" id="{33CF0362-6DC5-5D70-BFF5-3908C4F3E506}"/>
+                <a16:creationId xmlns:a16="http://schemas.microsoft.com/office/drawing/2014/main" id="{440AD6A6-5036-6BE7-2D94-F7F3AFC2A8E0}"/>
               </a:ext>
             </a:extLst>
           </p:cNvPr>
@@ -711,7 +711,7 @@
           <p:cNvPr id="4" name="日付プレースホルダー 3">
             <a:extLst>
               <a:ext uri="{FF2B5EF4-FFF2-40B4-BE49-F238E27FC236}">
-                <a16:creationId xmlns:a16="http://schemas.microsoft.com/office/drawing/2014/main" id="{D7528893-20FD-FF1D-F143-D80253445559}"/>
+                <a16:creationId xmlns:a16="http://schemas.microsoft.com/office/drawing/2014/main" id="{CA2E07E2-25CA-B8B7-C43F-B4CECC51D0F6}"/>
               </a:ext>
             </a:extLst>
           </p:cNvPr>
@@ -727,7 +727,7 @@
           <a:bodyPr/>
           <a:lstStyle/>
           <a:p>
-            <a:fld id="{1A6D1CB6-AAB3-48C3-A5E2-EE61602A8FD4}" type="datetimeFigureOut">
+            <a:fld id="{C6312477-18C9-4D6B-8390-793B6E30CE9F}" type="datetimeFigureOut">
               <a:rPr kumimoji="1" lang="ja-JP" altLang="en-US" smtClean="0"/>
               <a:t>2026/7/30</a:t>
             </a:fld>
@@ -740,7 +740,7 @@
           <p:cNvPr id="5" name="フッター プレースホルダー 4">
             <a:extLst>
               <a:ext uri="{FF2B5EF4-FFF2-40B4-BE49-F238E27FC236}">
-                <a16:creationId xmlns:a16="http://schemas.microsoft.com/office/drawing/2014/main" id="{9EE72AB7-0B35-B39D-830F-0D8DA6714205}"/>
+                <a16:creationId xmlns:a16="http://schemas.microsoft.com/office/drawing/2014/main" id="{C6414895-6A0B-2330-280F-A91E2DB0DD93}"/>
               </a:ext>
             </a:extLst>
           </p:cNvPr>
@@ -765,7 +765,7 @@
           <p:cNvPr id="6" name="スライド番号プレースホルダー 5">
             <a:extLst>
               <a:ext uri="{FF2B5EF4-FFF2-40B4-BE49-F238E27FC236}">
-                <a16:creationId xmlns:a16="http://schemas.microsoft.com/office/drawing/2014/main" id="{04304404-AF28-E62B-FA2E-0E22FD4F3C59}"/>
+                <a16:creationId xmlns:a16="http://schemas.microsoft.com/office/drawing/2014/main" id="{4C2E1EE9-DC24-1313-2FA7-6586FC0E599A}"/>
               </a:ext>
             </a:extLst>
           </p:cNvPr>
@@ -781,7 +781,7 @@
           <a:bodyPr/>
           <a:lstStyle/>
           <a:p>
-            <a:fld id="{09F59FD9-8A91-4C3A-8EB7-1DDE47E02B28}" type="slidenum">
+            <a:fld id="{720DFA25-211F-4ACA-A38F-6EDDE1834855}" type="slidenum">
               <a:rPr kumimoji="1" lang="ja-JP" altLang="en-US" smtClean="0"/>
               <a:t>‹#›</a:t>
             </a:fld>
@@ -792,7 +792,7 @@
     </p:spTree>
     <p:extLst>
       <p:ext uri="{BB962C8B-B14F-4D97-AF65-F5344CB8AC3E}">
-        <p14:creationId xmlns:p14="http://schemas.microsoft.com/office/powerpoint/2010/main" val="1972074244"/>
+        <p14:creationId xmlns:p14="http://schemas.microsoft.com/office/powerpoint/2010/main" val="1072577486"/>
       </p:ext>
     </p:extLst>
   </p:cSld>
@@ -824,7 +824,7 @@
           <p:cNvPr id="2" name="タイトル 1">
             <a:extLst>
               <a:ext uri="{FF2B5EF4-FFF2-40B4-BE49-F238E27FC236}">
-                <a16:creationId xmlns:a16="http://schemas.microsoft.com/office/drawing/2014/main" id="{D7295E25-891A-7EC3-CEE9-B6995B55FD41}"/>
+                <a16:creationId xmlns:a16="http://schemas.microsoft.com/office/drawing/2014/main" id="{55059A73-6A2F-BE70-82DB-0BB00CAB1575}"/>
               </a:ext>
             </a:extLst>
           </p:cNvPr>
@@ -852,7 +852,7 @@
           <p:cNvPr id="3" name="コンテンツ プレースホルダー 2">
             <a:extLst>
               <a:ext uri="{FF2B5EF4-FFF2-40B4-BE49-F238E27FC236}">
-                <a16:creationId xmlns:a16="http://schemas.microsoft.com/office/drawing/2014/main" id="{62928D11-E14D-7702-A171-04C7B76449EA}"/>
+                <a16:creationId xmlns:a16="http://schemas.microsoft.com/office/drawing/2014/main" id="{F32258CD-FBDC-3F09-4C0A-D4D63AD00C4B}"/>
               </a:ext>
             </a:extLst>
           </p:cNvPr>
@@ -941,7 +941,7 @@
           <p:cNvPr id="4" name="日付プレースホルダー 3">
             <a:extLst>
               <a:ext uri="{FF2B5EF4-FFF2-40B4-BE49-F238E27FC236}">
-                <a16:creationId xmlns:a16="http://schemas.microsoft.com/office/drawing/2014/main" id="{218D3AED-097F-F858-87B7-D34224473A14}"/>
+                <a16:creationId xmlns:a16="http://schemas.microsoft.com/office/drawing/2014/main" id="{501157B0-6832-C53E-855F-C5CD5133C9CA}"/>
               </a:ext>
             </a:extLst>
           </p:cNvPr>
@@ -957,7 +957,7 @@
           <a:bodyPr/>
           <a:lstStyle/>
           <a:p>
-            <a:fld id="{1A6D1CB6-AAB3-48C3-A5E2-EE61602A8FD4}" type="datetimeFigureOut">
+            <a:fld id="{C6312477-18C9-4D6B-8390-793B6E30CE9F}" type="datetimeFigureOut">
               <a:rPr kumimoji="1" lang="ja-JP" altLang="en-US" smtClean="0"/>
               <a:t>2026/7/30</a:t>
             </a:fld>
@@ -970,7 +970,7 @@
           <p:cNvPr id="5" name="フッター プレースホルダー 4">
             <a:extLst>
               <a:ext uri="{FF2B5EF4-FFF2-40B4-BE49-F238E27FC236}">
-                <a16:creationId xmlns:a16="http://schemas.microsoft.com/office/drawing/2014/main" id="{9BF3E582-4BAB-9A15-BA03-E6E1BAEA5462}"/>
+                <a16:creationId xmlns:a16="http://schemas.microsoft.com/office/drawing/2014/main" id="{B0D43D5E-DFB1-BF66-0C23-5872542E0FCB}"/>
               </a:ext>
             </a:extLst>
           </p:cNvPr>
@@ -995,7 +995,7 @@
           <p:cNvPr id="6" name="スライド番号プレースホルダー 5">
             <a:extLst>
               <a:ext uri="{FF2B5EF4-FFF2-40B4-BE49-F238E27FC236}">
-                <a16:creationId xmlns:a16="http://schemas.microsoft.com/office/drawing/2014/main" id="{1E547CC9-1211-F165-020A-13D91B61CC11}"/>
+                <a16:creationId xmlns:a16="http://schemas.microsoft.com/office/drawing/2014/main" id="{B444227D-8E4D-10F3-98BA-460A3FB76D86}"/>
               </a:ext>
             </a:extLst>
           </p:cNvPr>
@@ -1011,7 +1011,7 @@
           <a:bodyPr/>
           <a:lstStyle/>
           <a:p>
-            <a:fld id="{09F59FD9-8A91-4C3A-8EB7-1DDE47E02B28}" type="slidenum">
+            <a:fld id="{720DFA25-211F-4ACA-A38F-6EDDE1834855}" type="slidenum">
               <a:rPr kumimoji="1" lang="ja-JP" altLang="en-US" smtClean="0"/>
               <a:t>‹#›</a:t>
             </a:fld>
@@ -1022,7 +1022,7 @@
     </p:spTree>
     <p:extLst>
       <p:ext uri="{BB962C8B-B14F-4D97-AF65-F5344CB8AC3E}">
-        <p14:creationId xmlns:p14="http://schemas.microsoft.com/office/powerpoint/2010/main" val="2132271292"/>
+        <p14:creationId xmlns:p14="http://schemas.microsoft.com/office/powerpoint/2010/main" val="1432422318"/>
       </p:ext>
     </p:extLst>
   </p:cSld>
@@ -1054,7 +1054,7 @@
           <p:cNvPr id="2" name="タイトル 1">
             <a:extLst>
               <a:ext uri="{FF2B5EF4-FFF2-40B4-BE49-F238E27FC236}">
-                <a16:creationId xmlns:a16="http://schemas.microsoft.com/office/drawing/2014/main" id="{850D36F6-8939-C9B4-0878-DFD5E32CA5C0}"/>
+                <a16:creationId xmlns:a16="http://schemas.microsoft.com/office/drawing/2014/main" id="{24753CA4-57C9-29E2-AFC4-18C019809A67}"/>
               </a:ext>
             </a:extLst>
           </p:cNvPr>
@@ -1091,7 +1091,7 @@
           <p:cNvPr id="3" name="テキスト プレースホルダー 2">
             <a:extLst>
               <a:ext uri="{FF2B5EF4-FFF2-40B4-BE49-F238E27FC236}">
-                <a16:creationId xmlns:a16="http://schemas.microsoft.com/office/drawing/2014/main" id="{91B81012-81E0-9BAD-2F72-9425377108E4}"/>
+                <a16:creationId xmlns:a16="http://schemas.microsoft.com/office/drawing/2014/main" id="{D8CC98D4-C9F8-E345-4887-DCEDEA11E7E1}"/>
               </a:ext>
             </a:extLst>
           </p:cNvPr>
@@ -1216,7 +1216,7 @@
           <p:cNvPr id="4" name="日付プレースホルダー 3">
             <a:extLst>
               <a:ext uri="{FF2B5EF4-FFF2-40B4-BE49-F238E27FC236}">
-                <a16:creationId xmlns:a16="http://schemas.microsoft.com/office/drawing/2014/main" id="{F7E2D641-B943-5FC8-5A75-CB0317EA314E}"/>
+                <a16:creationId xmlns:a16="http://schemas.microsoft.com/office/drawing/2014/main" id="{381677F2-631C-4696-0C72-DE36AE6D2155}"/>
               </a:ext>
             </a:extLst>
           </p:cNvPr>
@@ -1232,7 +1232,7 @@
           <a:bodyPr/>
           <a:lstStyle/>
           <a:p>
-            <a:fld id="{1A6D1CB6-AAB3-48C3-A5E2-EE61602A8FD4}" type="datetimeFigureOut">
+            <a:fld id="{C6312477-18C9-4D6B-8390-793B6E30CE9F}" type="datetimeFigureOut">
               <a:rPr kumimoji="1" lang="ja-JP" altLang="en-US" smtClean="0"/>
               <a:t>2026/7/30</a:t>
             </a:fld>
@@ -1245,7 +1245,7 @@
           <p:cNvPr id="5" name="フッター プレースホルダー 4">
             <a:extLst>
               <a:ext uri="{FF2B5EF4-FFF2-40B4-BE49-F238E27FC236}">
-                <a16:creationId xmlns:a16="http://schemas.microsoft.com/office/drawing/2014/main" id="{AC37061F-82B2-1EF4-D2EA-364D8EC68DFB}"/>
+                <a16:creationId xmlns:a16="http://schemas.microsoft.com/office/drawing/2014/main" id="{1E2584A3-4B61-B72B-D0CA-5931FAB7601A}"/>
               </a:ext>
             </a:extLst>
           </p:cNvPr>
@@ -1270,7 +1270,7 @@
           <p:cNvPr id="6" name="スライド番号プレースホルダー 5">
             <a:extLst>
               <a:ext uri="{FF2B5EF4-FFF2-40B4-BE49-F238E27FC236}">
-                <a16:creationId xmlns:a16="http://schemas.microsoft.com/office/drawing/2014/main" id="{5FDD80E4-C954-B477-CC0A-42C3C8789238}"/>
+                <a16:creationId xmlns:a16="http://schemas.microsoft.com/office/drawing/2014/main" id="{EF79E41F-FE52-177C-EA53-F74F28FF54FE}"/>
               </a:ext>
             </a:extLst>
           </p:cNvPr>
@@ -1286,7 +1286,7 @@
           <a:bodyPr/>
           <a:lstStyle/>
           <a:p>
-            <a:fld id="{09F59FD9-8A91-4C3A-8EB7-1DDE47E02B28}" type="slidenum">
+            <a:fld id="{720DFA25-211F-4ACA-A38F-6EDDE1834855}" type="slidenum">
               <a:rPr kumimoji="1" lang="ja-JP" altLang="en-US" smtClean="0"/>
               <a:t>‹#›</a:t>
             </a:fld>
@@ -1297,7 +1297,7 @@
     </p:spTree>
     <p:extLst>
       <p:ext uri="{BB962C8B-B14F-4D97-AF65-F5344CB8AC3E}">
-        <p14:creationId xmlns:p14="http://schemas.microsoft.com/office/powerpoint/2010/main" val="3274807940"/>
+        <p14:creationId xmlns:p14="http://schemas.microsoft.com/office/powerpoint/2010/main" val="3967863700"/>
       </p:ext>
     </p:extLst>
   </p:cSld>
@@ -1329,7 +1329,7 @@
           <p:cNvPr id="2" name="タイトル 1">
             <a:extLst>
               <a:ext uri="{FF2B5EF4-FFF2-40B4-BE49-F238E27FC236}">
-                <a16:creationId xmlns:a16="http://schemas.microsoft.com/office/drawing/2014/main" id="{49939CEA-4896-514C-E935-47D80D4B5BEF}"/>
+                <a16:creationId xmlns:a16="http://schemas.microsoft.com/office/drawing/2014/main" id="{2FDC7F92-DCE5-D82B-ABAB-F8AFDEED1843}"/>
               </a:ext>
             </a:extLst>
           </p:cNvPr>
@@ -1357,7 +1357,7 @@
           <p:cNvPr id="3" name="コンテンツ プレースホルダー 2">
             <a:extLst>
               <a:ext uri="{FF2B5EF4-FFF2-40B4-BE49-F238E27FC236}">
-                <a16:creationId xmlns:a16="http://schemas.microsoft.com/office/drawing/2014/main" id="{11DF775F-F44E-25E7-6D7F-CC03171E9833}"/>
+                <a16:creationId xmlns:a16="http://schemas.microsoft.com/office/drawing/2014/main" id="{9FB6CCE0-96EB-DB79-FEFA-8EB133F882DD}"/>
               </a:ext>
             </a:extLst>
           </p:cNvPr>
@@ -1451,7 +1451,7 @@
           <p:cNvPr id="4" name="コンテンツ プレースホルダー 3">
             <a:extLst>
               <a:ext uri="{FF2B5EF4-FFF2-40B4-BE49-F238E27FC236}">
-                <a16:creationId xmlns:a16="http://schemas.microsoft.com/office/drawing/2014/main" id="{C537141B-E1D4-D526-AA71-D67B420E95DF}"/>
+                <a16:creationId xmlns:a16="http://schemas.microsoft.com/office/drawing/2014/main" id="{6894D086-7803-FB8B-8142-9D81230A4412}"/>
               </a:ext>
             </a:extLst>
           </p:cNvPr>
@@ -1545,7 +1545,7 @@
           <p:cNvPr id="5" name="日付プレースホルダー 4">
             <a:extLst>
               <a:ext uri="{FF2B5EF4-FFF2-40B4-BE49-F238E27FC236}">
-                <a16:creationId xmlns:a16="http://schemas.microsoft.com/office/drawing/2014/main" id="{37B6C6C5-EA87-3F6F-EC26-B3342B7B84E1}"/>
+                <a16:creationId xmlns:a16="http://schemas.microsoft.com/office/drawing/2014/main" id="{E515BD7D-A1B0-0370-21E0-DBC525506939}"/>
               </a:ext>
             </a:extLst>
           </p:cNvPr>
@@ -1561,7 +1561,7 @@
           <a:bodyPr/>
           <a:lstStyle/>
           <a:p>
-            <a:fld id="{1A6D1CB6-AAB3-48C3-A5E2-EE61602A8FD4}" type="datetimeFigureOut">
+            <a:fld id="{C6312477-18C9-4D6B-8390-793B6E30CE9F}" type="datetimeFigureOut">
               <a:rPr kumimoji="1" lang="ja-JP" altLang="en-US" smtClean="0"/>
               <a:t>2026/7/30</a:t>
             </a:fld>
@@ -1574,7 +1574,7 @@
           <p:cNvPr id="6" name="フッター プレースホルダー 5">
             <a:extLst>
               <a:ext uri="{FF2B5EF4-FFF2-40B4-BE49-F238E27FC236}">
-                <a16:creationId xmlns:a16="http://schemas.microsoft.com/office/drawing/2014/main" id="{283156A5-0E0C-3FB0-FA7D-B5BD46E46C22}"/>
+                <a16:creationId xmlns:a16="http://schemas.microsoft.com/office/drawing/2014/main" id="{5405011F-E738-4C59-E4D3-FF0788E40380}"/>
               </a:ext>
             </a:extLst>
           </p:cNvPr>
@@ -1599,7 +1599,7 @@
           <p:cNvPr id="7" name="スライド番号プレースホルダー 6">
             <a:extLst>
               <a:ext uri="{FF2B5EF4-FFF2-40B4-BE49-F238E27FC236}">
-                <a16:creationId xmlns:a16="http://schemas.microsoft.com/office/drawing/2014/main" id="{954DE711-F2EC-7313-D310-BB44EC4FB870}"/>
+                <a16:creationId xmlns:a16="http://schemas.microsoft.com/office/drawing/2014/main" id="{94BCC4AB-61A6-2766-2128-DD45C895B537}"/>
               </a:ext>
             </a:extLst>
           </p:cNvPr>
@@ -1615,7 +1615,7 @@
           <a:bodyPr/>
           <a:lstStyle/>
           <a:p>
-            <a:fld id="{09F59FD9-8A91-4C3A-8EB7-1DDE47E02B28}" type="slidenum">
+            <a:fld id="{720DFA25-211F-4ACA-A38F-6EDDE1834855}" type="slidenum">
               <a:rPr kumimoji="1" lang="ja-JP" altLang="en-US" smtClean="0"/>
               <a:t>‹#›</a:t>
             </a:fld>
@@ -1626,7 +1626,7 @@
     </p:spTree>
     <p:extLst>
       <p:ext uri="{BB962C8B-B14F-4D97-AF65-F5344CB8AC3E}">
-        <p14:creationId xmlns:p14="http://schemas.microsoft.com/office/powerpoint/2010/main" val="2972180213"/>
+        <p14:creationId xmlns:p14="http://schemas.microsoft.com/office/powerpoint/2010/main" val="398531134"/>
       </p:ext>
     </p:extLst>
   </p:cSld>
@@ -1658,7 +1658,7 @@
           <p:cNvPr id="2" name="タイトル 1">
             <a:extLst>
               <a:ext uri="{FF2B5EF4-FFF2-40B4-BE49-F238E27FC236}">
-                <a16:creationId xmlns:a16="http://schemas.microsoft.com/office/drawing/2014/main" id="{64CFD260-5245-9C2C-EB6A-9A5A6B21D1EA}"/>
+                <a16:creationId xmlns:a16="http://schemas.microsoft.com/office/drawing/2014/main" id="{3E55DC02-22E7-7A04-02C5-4B0FECDC8D8F}"/>
               </a:ext>
             </a:extLst>
           </p:cNvPr>
@@ -1691,7 +1691,7 @@
           <p:cNvPr id="3" name="テキスト プレースホルダー 2">
             <a:extLst>
               <a:ext uri="{FF2B5EF4-FFF2-40B4-BE49-F238E27FC236}">
-                <a16:creationId xmlns:a16="http://schemas.microsoft.com/office/drawing/2014/main" id="{6902EACE-1EBA-D81A-022A-E42F320E5DAC}"/>
+                <a16:creationId xmlns:a16="http://schemas.microsoft.com/office/drawing/2014/main" id="{606654C5-1FE0-AA03-EA62-63FB8F27B3D5}"/>
               </a:ext>
             </a:extLst>
           </p:cNvPr>
@@ -1762,7 +1762,7 @@
           <p:cNvPr id="4" name="コンテンツ プレースホルダー 3">
             <a:extLst>
               <a:ext uri="{FF2B5EF4-FFF2-40B4-BE49-F238E27FC236}">
-                <a16:creationId xmlns:a16="http://schemas.microsoft.com/office/drawing/2014/main" id="{F3300EB7-AFC8-DC2E-F5BB-B95CDB66DE41}"/>
+                <a16:creationId xmlns:a16="http://schemas.microsoft.com/office/drawing/2014/main" id="{EF046153-EF81-87DD-22C8-4AFE802CB6EA}"/>
               </a:ext>
             </a:extLst>
           </p:cNvPr>
@@ -1856,7 +1856,7 @@
           <p:cNvPr id="5" name="テキスト プレースホルダー 4">
             <a:extLst>
               <a:ext uri="{FF2B5EF4-FFF2-40B4-BE49-F238E27FC236}">
-                <a16:creationId xmlns:a16="http://schemas.microsoft.com/office/drawing/2014/main" id="{FCEACFEE-450C-BF49-FBB3-1106A0B690F6}"/>
+                <a16:creationId xmlns:a16="http://schemas.microsoft.com/office/drawing/2014/main" id="{4425FC46-233B-DE1F-353C-8BED48B2EBDE}"/>
               </a:ext>
             </a:extLst>
           </p:cNvPr>
@@ -1927,7 +1927,7 @@
           <p:cNvPr id="6" name="コンテンツ プレースホルダー 5">
             <a:extLst>
               <a:ext uri="{FF2B5EF4-FFF2-40B4-BE49-F238E27FC236}">
-                <a16:creationId xmlns:a16="http://schemas.microsoft.com/office/drawing/2014/main" id="{CF14F879-7142-DA6B-BB94-71E3CA4B3B55}"/>
+                <a16:creationId xmlns:a16="http://schemas.microsoft.com/office/drawing/2014/main" id="{EDD0BDCC-8908-5373-87EC-D7FAD88B2345}"/>
               </a:ext>
             </a:extLst>
           </p:cNvPr>
@@ -2021,7 +2021,7 @@
           <p:cNvPr id="7" name="日付プレースホルダー 6">
             <a:extLst>
               <a:ext uri="{FF2B5EF4-FFF2-40B4-BE49-F238E27FC236}">
-                <a16:creationId xmlns:a16="http://schemas.microsoft.com/office/drawing/2014/main" id="{A3AED6EB-BB79-1F45-2779-092FF51C2285}"/>
+                <a16:creationId xmlns:a16="http://schemas.microsoft.com/office/drawing/2014/main" id="{B5BA5E40-424E-9F41-731E-00255D29CEBB}"/>
               </a:ext>
             </a:extLst>
           </p:cNvPr>
@@ -2037,7 +2037,7 @@
           <a:bodyPr/>
           <a:lstStyle/>
           <a:p>
-            <a:fld id="{1A6D1CB6-AAB3-48C3-A5E2-EE61602A8FD4}" type="datetimeFigureOut">
+            <a:fld id="{C6312477-18C9-4D6B-8390-793B6E30CE9F}" type="datetimeFigureOut">
               <a:rPr kumimoji="1" lang="ja-JP" altLang="en-US" smtClean="0"/>
               <a:t>2026/7/30</a:t>
             </a:fld>
@@ -2050,7 +2050,7 @@
           <p:cNvPr id="8" name="フッター プレースホルダー 7">
             <a:extLst>
               <a:ext uri="{FF2B5EF4-FFF2-40B4-BE49-F238E27FC236}">
-                <a16:creationId xmlns:a16="http://schemas.microsoft.com/office/drawing/2014/main" id="{0839738E-C1D5-21C7-713A-A1538214E72B}"/>
+                <a16:creationId xmlns:a16="http://schemas.microsoft.com/office/drawing/2014/main" id="{465C0077-8211-185E-BEC1-D1EEA3B1E0E9}"/>
               </a:ext>
             </a:extLst>
           </p:cNvPr>
@@ -2075,7 +2075,7 @@
           <p:cNvPr id="9" name="スライド番号プレースホルダー 8">
             <a:extLst>
               <a:ext uri="{FF2B5EF4-FFF2-40B4-BE49-F238E27FC236}">
-                <a16:creationId xmlns:a16="http://schemas.microsoft.com/office/drawing/2014/main" id="{3D3AB79C-36FC-7BA2-0E57-305435DD0829}"/>
+                <a16:creationId xmlns:a16="http://schemas.microsoft.com/office/drawing/2014/main" id="{E97B9EA3-2889-590A-DCA1-02141984932B}"/>
               </a:ext>
             </a:extLst>
           </p:cNvPr>
@@ -2091,7 +2091,7 @@
           <a:bodyPr/>
           <a:lstStyle/>
           <a:p>
-            <a:fld id="{09F59FD9-8A91-4C3A-8EB7-1DDE47E02B28}" type="slidenum">
+            <a:fld id="{720DFA25-211F-4ACA-A38F-6EDDE1834855}" type="slidenum">
               <a:rPr kumimoji="1" lang="ja-JP" altLang="en-US" smtClean="0"/>
               <a:t>‹#›</a:t>
             </a:fld>
@@ -2102,7 +2102,7 @@
     </p:spTree>
     <p:extLst>
       <p:ext uri="{BB962C8B-B14F-4D97-AF65-F5344CB8AC3E}">
-        <p14:creationId xmlns:p14="http://schemas.microsoft.com/office/powerpoint/2010/main" val="2998386108"/>
+        <p14:creationId xmlns:p14="http://schemas.microsoft.com/office/powerpoint/2010/main" val="27788081"/>
       </p:ext>
     </p:extLst>
   </p:cSld>
@@ -2134,7 +2134,7 @@
           <p:cNvPr id="2" name="タイトル 1">
             <a:extLst>
               <a:ext uri="{FF2B5EF4-FFF2-40B4-BE49-F238E27FC236}">
-                <a16:creationId xmlns:a16="http://schemas.microsoft.com/office/drawing/2014/main" id="{36856CFF-7244-826D-7BAC-8A43F51757C9}"/>
+                <a16:creationId xmlns:a16="http://schemas.microsoft.com/office/drawing/2014/main" id="{F142D705-96EA-4169-22D1-35AFEC38F3ED}"/>
               </a:ext>
             </a:extLst>
           </p:cNvPr>
@@ -2162,7 +2162,7 @@
           <p:cNvPr id="3" name="日付プレースホルダー 2">
             <a:extLst>
               <a:ext uri="{FF2B5EF4-FFF2-40B4-BE49-F238E27FC236}">
-                <a16:creationId xmlns:a16="http://schemas.microsoft.com/office/drawing/2014/main" id="{5DAACC7F-706E-2827-C781-058D66F32F11}"/>
+                <a16:creationId xmlns:a16="http://schemas.microsoft.com/office/drawing/2014/main" id="{0DD61372-D1D5-9353-2FFF-FE5EEDB62B73}"/>
               </a:ext>
             </a:extLst>
           </p:cNvPr>
@@ -2178,7 +2178,7 @@
           <a:bodyPr/>
           <a:lstStyle/>
           <a:p>
-            <a:fld id="{1A6D1CB6-AAB3-48C3-A5E2-EE61602A8FD4}" type="datetimeFigureOut">
+            <a:fld id="{C6312477-18C9-4D6B-8390-793B6E30CE9F}" type="datetimeFigureOut">
               <a:rPr kumimoji="1" lang="ja-JP" altLang="en-US" smtClean="0"/>
               <a:t>2026/7/30</a:t>
             </a:fld>
@@ -2191,7 +2191,7 @@
           <p:cNvPr id="4" name="フッター プレースホルダー 3">
             <a:extLst>
               <a:ext uri="{FF2B5EF4-FFF2-40B4-BE49-F238E27FC236}">
-                <a16:creationId xmlns:a16="http://schemas.microsoft.com/office/drawing/2014/main" id="{0DB0BBF1-A63A-EFDC-CA56-9E1360C128A2}"/>
+                <a16:creationId xmlns:a16="http://schemas.microsoft.com/office/drawing/2014/main" id="{4A72152C-E6D8-FB6C-BB6F-3A9B1767E893}"/>
               </a:ext>
             </a:extLst>
           </p:cNvPr>
@@ -2216,7 +2216,7 @@
           <p:cNvPr id="5" name="スライド番号プレースホルダー 4">
             <a:extLst>
               <a:ext uri="{FF2B5EF4-FFF2-40B4-BE49-F238E27FC236}">
-                <a16:creationId xmlns:a16="http://schemas.microsoft.com/office/drawing/2014/main" id="{0B4F22B6-5C91-ACEE-D071-77F25156413F}"/>
+                <a16:creationId xmlns:a16="http://schemas.microsoft.com/office/drawing/2014/main" id="{62AFCE14-0B65-F30D-3304-86861D7B99C5}"/>
               </a:ext>
             </a:extLst>
           </p:cNvPr>
@@ -2232,7 +2232,7 @@
           <a:bodyPr/>
           <a:lstStyle/>
           <a:p>
-            <a:fld id="{09F59FD9-8A91-4C3A-8EB7-1DDE47E02B28}" type="slidenum">
+            <a:fld id="{720DFA25-211F-4ACA-A38F-6EDDE1834855}" type="slidenum">
               <a:rPr kumimoji="1" lang="ja-JP" altLang="en-US" smtClean="0"/>
               <a:t>‹#›</a:t>
             </a:fld>
@@ -2243,7 +2243,7 @@
     </p:spTree>
     <p:extLst>
       <p:ext uri="{BB962C8B-B14F-4D97-AF65-F5344CB8AC3E}">
-        <p14:creationId xmlns:p14="http://schemas.microsoft.com/office/powerpoint/2010/main" val="1244928988"/>
+        <p14:creationId xmlns:p14="http://schemas.microsoft.com/office/powerpoint/2010/main" val="1051861105"/>
       </p:ext>
     </p:extLst>
   </p:cSld>
@@ -2275,7 +2275,7 @@
           <p:cNvPr id="2" name="日付プレースホルダー 1">
             <a:extLst>
               <a:ext uri="{FF2B5EF4-FFF2-40B4-BE49-F238E27FC236}">
-                <a16:creationId xmlns:a16="http://schemas.microsoft.com/office/drawing/2014/main" id="{E6C72DF8-4D14-4370-CE31-DC270CD71727}"/>
+                <a16:creationId xmlns:a16="http://schemas.microsoft.com/office/drawing/2014/main" id="{9BBC1394-8113-B3E6-331A-4354B9862449}"/>
               </a:ext>
             </a:extLst>
           </p:cNvPr>
@@ -2291,7 +2291,7 @@
           <a:bodyPr/>
           <a:lstStyle/>
           <a:p>
-            <a:fld id="{1A6D1CB6-AAB3-48C3-A5E2-EE61602A8FD4}" type="datetimeFigureOut">
+            <a:fld id="{C6312477-18C9-4D6B-8390-793B6E30CE9F}" type="datetimeFigureOut">
               <a:rPr kumimoji="1" lang="ja-JP" altLang="en-US" smtClean="0"/>
               <a:t>2026/7/30</a:t>
             </a:fld>
@@ -2304,7 +2304,7 @@
           <p:cNvPr id="3" name="フッター プレースホルダー 2">
             <a:extLst>
               <a:ext uri="{FF2B5EF4-FFF2-40B4-BE49-F238E27FC236}">
-                <a16:creationId xmlns:a16="http://schemas.microsoft.com/office/drawing/2014/main" id="{CEDD9D94-5763-6D38-CFD0-F40197678C4F}"/>
+                <a16:creationId xmlns:a16="http://schemas.microsoft.com/office/drawing/2014/main" id="{A1B49022-B2D1-7BA6-0A0D-C6C7016D95BB}"/>
               </a:ext>
             </a:extLst>
           </p:cNvPr>
@@ -2329,7 +2329,7 @@
           <p:cNvPr id="4" name="スライド番号プレースホルダー 3">
             <a:extLst>
               <a:ext uri="{FF2B5EF4-FFF2-40B4-BE49-F238E27FC236}">
-                <a16:creationId xmlns:a16="http://schemas.microsoft.com/office/drawing/2014/main" id="{0B9A0C7B-E6EA-298C-A02A-EDF38FB69DB6}"/>
+                <a16:creationId xmlns:a16="http://schemas.microsoft.com/office/drawing/2014/main" id="{9F27CF35-32AF-BC3F-D2B8-E50CB2C3E331}"/>
               </a:ext>
             </a:extLst>
           </p:cNvPr>
@@ -2345,7 +2345,7 @@
           <a:bodyPr/>
           <a:lstStyle/>
           <a:p>
-            <a:fld id="{09F59FD9-8A91-4C3A-8EB7-1DDE47E02B28}" type="slidenum">
+            <a:fld id="{720DFA25-211F-4ACA-A38F-6EDDE1834855}" type="slidenum">
               <a:rPr kumimoji="1" lang="ja-JP" altLang="en-US" smtClean="0"/>
               <a:t>‹#›</a:t>
             </a:fld>
@@ -2356,7 +2356,7 @@
     </p:spTree>
     <p:extLst>
       <p:ext uri="{BB962C8B-B14F-4D97-AF65-F5344CB8AC3E}">
-        <p14:creationId xmlns:p14="http://schemas.microsoft.com/office/powerpoint/2010/main" val="4219895721"/>
+        <p14:creationId xmlns:p14="http://schemas.microsoft.com/office/powerpoint/2010/main" val="2802436460"/>
       </p:ext>
     </p:extLst>
   </p:cSld>
@@ -2388,7 +2388,7 @@
           <p:cNvPr id="2" name="タイトル 1">
             <a:extLst>
               <a:ext uri="{FF2B5EF4-FFF2-40B4-BE49-F238E27FC236}">
-                <a16:creationId xmlns:a16="http://schemas.microsoft.com/office/drawing/2014/main" id="{909C7B64-3C62-33F0-9C8D-249CDBA534D5}"/>
+                <a16:creationId xmlns:a16="http://schemas.microsoft.com/office/drawing/2014/main" id="{97621147-F24B-186A-0DA0-6F9E97E7403C}"/>
               </a:ext>
             </a:extLst>
           </p:cNvPr>
@@ -2425,7 +2425,7 @@
           <p:cNvPr id="3" name="コンテンツ プレースホルダー 2">
             <a:extLst>
               <a:ext uri="{FF2B5EF4-FFF2-40B4-BE49-F238E27FC236}">
-                <a16:creationId xmlns:a16="http://schemas.microsoft.com/office/drawing/2014/main" id="{19AD0F15-721D-DB79-9A91-1CE51F1FDAFE}"/>
+                <a16:creationId xmlns:a16="http://schemas.microsoft.com/office/drawing/2014/main" id="{5BE8B957-87F6-4F96-A45F-1EE0639DB82D}"/>
               </a:ext>
             </a:extLst>
           </p:cNvPr>
@@ -2547,7 +2547,7 @@
           <p:cNvPr id="4" name="テキスト プレースホルダー 3">
             <a:extLst>
               <a:ext uri="{FF2B5EF4-FFF2-40B4-BE49-F238E27FC236}">
-                <a16:creationId xmlns:a16="http://schemas.microsoft.com/office/drawing/2014/main" id="{2F9181EC-95BA-D23A-2AEA-948B083289C4}"/>
+                <a16:creationId xmlns:a16="http://schemas.microsoft.com/office/drawing/2014/main" id="{31EB2EC9-704D-1814-C8D8-42F74DED1716}"/>
               </a:ext>
             </a:extLst>
           </p:cNvPr>
@@ -2618,7 +2618,7 @@
           <p:cNvPr id="5" name="日付プレースホルダー 4">
             <a:extLst>
               <a:ext uri="{FF2B5EF4-FFF2-40B4-BE49-F238E27FC236}">
-                <a16:creationId xmlns:a16="http://schemas.microsoft.com/office/drawing/2014/main" id="{DFD5D5B0-41B4-4924-1A8C-6CA8A309629E}"/>
+                <a16:creationId xmlns:a16="http://schemas.microsoft.com/office/drawing/2014/main" id="{14C13ED6-6E04-7E3E-6719-A45B4C5BFD0B}"/>
               </a:ext>
             </a:extLst>
           </p:cNvPr>
@@ -2634,7 +2634,7 @@
           <a:bodyPr/>
           <a:lstStyle/>
           <a:p>
-            <a:fld id="{1A6D1CB6-AAB3-48C3-A5E2-EE61602A8FD4}" type="datetimeFigureOut">
+            <a:fld id="{C6312477-18C9-4D6B-8390-793B6E30CE9F}" type="datetimeFigureOut">
               <a:rPr kumimoji="1" lang="ja-JP" altLang="en-US" smtClean="0"/>
               <a:t>2026/7/30</a:t>
             </a:fld>
@@ -2647,7 +2647,7 @@
           <p:cNvPr id="6" name="フッター プレースホルダー 5">
             <a:extLst>
               <a:ext uri="{FF2B5EF4-FFF2-40B4-BE49-F238E27FC236}">
-                <a16:creationId xmlns:a16="http://schemas.microsoft.com/office/drawing/2014/main" id="{D84EED22-BCEC-FDED-1E24-F890C18C5F46}"/>
+                <a16:creationId xmlns:a16="http://schemas.microsoft.com/office/drawing/2014/main" id="{FBA11875-2E38-DB49-5703-CEB36DAE355D}"/>
               </a:ext>
             </a:extLst>
           </p:cNvPr>
@@ -2672,7 +2672,7 @@
           <p:cNvPr id="7" name="スライド番号プレースホルダー 6">
             <a:extLst>
               <a:ext uri="{FF2B5EF4-FFF2-40B4-BE49-F238E27FC236}">
-                <a16:creationId xmlns:a16="http://schemas.microsoft.com/office/drawing/2014/main" id="{455865A5-3E9F-BF73-4AAC-299EFC28B79E}"/>
+                <a16:creationId xmlns:a16="http://schemas.microsoft.com/office/drawing/2014/main" id="{56570BB6-A877-094E-1C7F-B09ECBF12B70}"/>
               </a:ext>
             </a:extLst>
           </p:cNvPr>
@@ -2688,7 +2688,7 @@
           <a:bodyPr/>
           <a:lstStyle/>
           <a:p>
-            <a:fld id="{09F59FD9-8A91-4C3A-8EB7-1DDE47E02B28}" type="slidenum">
+            <a:fld id="{720DFA25-211F-4ACA-A38F-6EDDE1834855}" type="slidenum">
               <a:rPr kumimoji="1" lang="ja-JP" altLang="en-US" smtClean="0"/>
               <a:t>‹#›</a:t>
             </a:fld>
@@ -2699,7 +2699,7 @@
     </p:spTree>
     <p:extLst>
       <p:ext uri="{BB962C8B-B14F-4D97-AF65-F5344CB8AC3E}">
-        <p14:creationId xmlns:p14="http://schemas.microsoft.com/office/powerpoint/2010/main" val="3029657938"/>
+        <p14:creationId xmlns:p14="http://schemas.microsoft.com/office/powerpoint/2010/main" val="333687043"/>
       </p:ext>
     </p:extLst>
   </p:cSld>
@@ -2731,7 +2731,7 @@
           <p:cNvPr id="2" name="タイトル 1">
             <a:extLst>
               <a:ext uri="{FF2B5EF4-FFF2-40B4-BE49-F238E27FC236}">
-                <a16:creationId xmlns:a16="http://schemas.microsoft.com/office/drawing/2014/main" id="{C37BB184-A3CD-1F1C-1D82-5F6EC74332D6}"/>
+                <a16:creationId xmlns:a16="http://schemas.microsoft.com/office/drawing/2014/main" id="{0A2E40B4-97B0-FA57-DCBC-4BE643A2CFF5}"/>
               </a:ext>
             </a:extLst>
           </p:cNvPr>
@@ -2768,7 +2768,7 @@
           <p:cNvPr id="3" name="図プレースホルダー 2">
             <a:extLst>
               <a:ext uri="{FF2B5EF4-FFF2-40B4-BE49-F238E27FC236}">
-                <a16:creationId xmlns:a16="http://schemas.microsoft.com/office/drawing/2014/main" id="{7207FCF4-816A-1DC9-CDC6-C5E1D487C9BD}"/>
+                <a16:creationId xmlns:a16="http://schemas.microsoft.com/office/drawing/2014/main" id="{77FF42C1-A904-92E6-54F1-46DB9CF8BB20}"/>
               </a:ext>
             </a:extLst>
           </p:cNvPr>
@@ -2835,7 +2835,7 @@
           <p:cNvPr id="4" name="テキスト プレースホルダー 3">
             <a:extLst>
               <a:ext uri="{FF2B5EF4-FFF2-40B4-BE49-F238E27FC236}">
-                <a16:creationId xmlns:a16="http://schemas.microsoft.com/office/drawing/2014/main" id="{73EA5B17-9CF2-C332-F3F2-ECFE68145F51}"/>
+                <a16:creationId xmlns:a16="http://schemas.microsoft.com/office/drawing/2014/main" id="{AC145365-F88D-2CD4-8B78-7E79183A659D}"/>
               </a:ext>
             </a:extLst>
           </p:cNvPr>
@@ -2906,7 +2906,7 @@
           <p:cNvPr id="5" name="日付プレースホルダー 4">
             <a:extLst>
               <a:ext uri="{FF2B5EF4-FFF2-40B4-BE49-F238E27FC236}">
-                <a16:creationId xmlns:a16="http://schemas.microsoft.com/office/drawing/2014/main" id="{EA800659-1090-3109-C147-E9A0E6EE35C0}"/>
+                <a16:creationId xmlns:a16="http://schemas.microsoft.com/office/drawing/2014/main" id="{F6214169-ED22-BEE9-4857-EC810E57ED1A}"/>
               </a:ext>
             </a:extLst>
           </p:cNvPr>
@@ -2922,7 +2922,7 @@
           <a:bodyPr/>
           <a:lstStyle/>
           <a:p>
-            <a:fld id="{1A6D1CB6-AAB3-48C3-A5E2-EE61602A8FD4}" type="datetimeFigureOut">
+            <a:fld id="{C6312477-18C9-4D6B-8390-793B6E30CE9F}" type="datetimeFigureOut">
               <a:rPr kumimoji="1" lang="ja-JP" altLang="en-US" smtClean="0"/>
               <a:t>2026/7/30</a:t>
             </a:fld>
@@ -2935,7 +2935,7 @@
           <p:cNvPr id="6" name="フッター プレースホルダー 5">
             <a:extLst>
               <a:ext uri="{FF2B5EF4-FFF2-40B4-BE49-F238E27FC236}">
-                <a16:creationId xmlns:a16="http://schemas.microsoft.com/office/drawing/2014/main" id="{A6A63678-02DB-02D5-8A28-6025089CEE74}"/>
+                <a16:creationId xmlns:a16="http://schemas.microsoft.com/office/drawing/2014/main" id="{7BFC1E45-8CF5-F83A-9CDC-6A58631AC859}"/>
               </a:ext>
             </a:extLst>
           </p:cNvPr>
@@ -2960,7 +2960,7 @@
           <p:cNvPr id="7" name="スライド番号プレースホルダー 6">
             <a:extLst>
               <a:ext uri="{FF2B5EF4-FFF2-40B4-BE49-F238E27FC236}">
-                <a16:creationId xmlns:a16="http://schemas.microsoft.com/office/drawing/2014/main" id="{99EC797D-FA78-F234-86AA-6AB2753B6604}"/>
+                <a16:creationId xmlns:a16="http://schemas.microsoft.com/office/drawing/2014/main" id="{95521DBE-4E9A-52CC-119B-F1A0357C1DB2}"/>
               </a:ext>
             </a:extLst>
           </p:cNvPr>
@@ -2976,7 +2976,7 @@
           <a:bodyPr/>
           <a:lstStyle/>
           <a:p>
-            <a:fld id="{09F59FD9-8A91-4C3A-8EB7-1DDE47E02B28}" type="slidenum">
+            <a:fld id="{720DFA25-211F-4ACA-A38F-6EDDE1834855}" type="slidenum">
               <a:rPr kumimoji="1" lang="ja-JP" altLang="en-US" smtClean="0"/>
               <a:t>‹#›</a:t>
             </a:fld>
@@ -2987,7 +2987,7 @@
     </p:spTree>
     <p:extLst>
       <p:ext uri="{BB962C8B-B14F-4D97-AF65-F5344CB8AC3E}">
-        <p14:creationId xmlns:p14="http://schemas.microsoft.com/office/powerpoint/2010/main" val="4290226897"/>
+        <p14:creationId xmlns:p14="http://schemas.microsoft.com/office/powerpoint/2010/main" val="755669699"/>
       </p:ext>
     </p:extLst>
   </p:cSld>
@@ -3024,7 +3024,7 @@
           <p:cNvPr id="2" name="タイトル プレースホルダー 1">
             <a:extLst>
               <a:ext uri="{FF2B5EF4-FFF2-40B4-BE49-F238E27FC236}">
-                <a16:creationId xmlns:a16="http://schemas.microsoft.com/office/drawing/2014/main" id="{E8A373A2-ACB4-E834-1092-6AB9CAFE0B77}"/>
+                <a16:creationId xmlns:a16="http://schemas.microsoft.com/office/drawing/2014/main" id="{CE528583-C8E5-C4C3-5C4E-18BB8318B8AA}"/>
               </a:ext>
             </a:extLst>
           </p:cNvPr>
@@ -3062,7 +3062,7 @@
           <p:cNvPr id="3" name="テキスト プレースホルダー 2">
             <a:extLst>
               <a:ext uri="{FF2B5EF4-FFF2-40B4-BE49-F238E27FC236}">
-                <a16:creationId xmlns:a16="http://schemas.microsoft.com/office/drawing/2014/main" id="{C6F0D6C8-A5B5-3B70-3EE1-D9C426A159B3}"/>
+                <a16:creationId xmlns:a16="http://schemas.microsoft.com/office/drawing/2014/main" id="{098B9358-D1B6-1B45-8F17-5C7B903B672D}"/>
               </a:ext>
             </a:extLst>
           </p:cNvPr>
@@ -3161,7 +3161,7 @@
           <p:cNvPr id="4" name="日付プレースホルダー 3">
             <a:extLst>
               <a:ext uri="{FF2B5EF4-FFF2-40B4-BE49-F238E27FC236}">
-                <a16:creationId xmlns:a16="http://schemas.microsoft.com/office/drawing/2014/main" id="{F0BF2FAB-392F-ECBF-E425-B1FB55551221}"/>
+                <a16:creationId xmlns:a16="http://schemas.microsoft.com/office/drawing/2014/main" id="{8A9CE08F-1B0F-3294-5AB2-4D66359F65EB}"/>
               </a:ext>
             </a:extLst>
           </p:cNvPr>
@@ -3195,7 +3195,7 @@
             </a:lvl1pPr>
           </a:lstStyle>
           <a:p>
-            <a:fld id="{1A6D1CB6-AAB3-48C3-A5E2-EE61602A8FD4}" type="datetimeFigureOut">
+            <a:fld id="{C6312477-18C9-4D6B-8390-793B6E30CE9F}" type="datetimeFigureOut">
               <a:rPr kumimoji="1" lang="ja-JP" altLang="en-US" smtClean="0"/>
               <a:t>2026/7/30</a:t>
             </a:fld>
@@ -3208,7 +3208,7 @@
           <p:cNvPr id="5" name="フッター プレースホルダー 4">
             <a:extLst>
               <a:ext uri="{FF2B5EF4-FFF2-40B4-BE49-F238E27FC236}">
-                <a16:creationId xmlns:a16="http://schemas.microsoft.com/office/drawing/2014/main" id="{65FBB335-C34D-7BF8-2206-0BEE9620E916}"/>
+                <a16:creationId xmlns:a16="http://schemas.microsoft.com/office/drawing/2014/main" id="{F2E61290-F21A-BD60-DE5D-9D3478483E69}"/>
               </a:ext>
             </a:extLst>
           </p:cNvPr>
@@ -3251,7 +3251,7 @@
           <p:cNvPr id="6" name="スライド番号プレースホルダー 5">
             <a:extLst>
               <a:ext uri="{FF2B5EF4-FFF2-40B4-BE49-F238E27FC236}">
-                <a16:creationId xmlns:a16="http://schemas.microsoft.com/office/drawing/2014/main" id="{8288061C-A805-8447-497E-DA3D07CEE1AC}"/>
+                <a16:creationId xmlns:a16="http://schemas.microsoft.com/office/drawing/2014/main" id="{69C2F633-8D71-FC88-0A13-7D4CCC4B4266}"/>
               </a:ext>
             </a:extLst>
           </p:cNvPr>
@@ -3285,7 +3285,7 @@
             </a:lvl1pPr>
           </a:lstStyle>
           <a:p>
-            <a:fld id="{09F59FD9-8A91-4C3A-8EB7-1DDE47E02B28}" type="slidenum">
+            <a:fld id="{720DFA25-211F-4ACA-A38F-6EDDE1834855}" type="slidenum">
               <a:rPr kumimoji="1" lang="ja-JP" altLang="en-US" smtClean="0"/>
               <a:t>‹#›</a:t>
             </a:fld>
@@ -3296,7 +3296,7 @@
     </p:spTree>
     <p:extLst>
       <p:ext uri="{BB962C8B-B14F-4D97-AF65-F5344CB8AC3E}">
-        <p14:creationId xmlns:p14="http://schemas.microsoft.com/office/powerpoint/2010/main" val="3340778040"/>
+        <p14:creationId xmlns:p14="http://schemas.microsoft.com/office/powerpoint/2010/main" val="2105145232"/>
       </p:ext>
     </p:extLst>
   </p:cSld>
@@ -3619,7 +3619,7 @@
           <p:cNvPr id="2" name="テキスト ボックス 1">
             <a:extLst>
               <a:ext uri="{FF2B5EF4-FFF2-40B4-BE49-F238E27FC236}">
-                <a16:creationId xmlns:a16="http://schemas.microsoft.com/office/drawing/2014/main" id="{20B6C979-9CED-E298-629D-84D8E8EC23E4}"/>
+                <a16:creationId xmlns:a16="http://schemas.microsoft.com/office/drawing/2014/main" id="{5E49B634-EF50-32F5-EACB-DF39DC94C428}"/>
               </a:ext>
             </a:extLst>
           </p:cNvPr>
@@ -3665,7 +3665,7 @@
           <p:cNvPr id="3" name="テキスト ボックス 2">
             <a:extLst>
               <a:ext uri="{FF2B5EF4-FFF2-40B4-BE49-F238E27FC236}">
-                <a16:creationId xmlns:a16="http://schemas.microsoft.com/office/drawing/2014/main" id="{74AF1E1E-FEFC-EE9F-8D5A-9CFD39939312}"/>
+                <a16:creationId xmlns:a16="http://schemas.microsoft.com/office/drawing/2014/main" id="{D479A542-F06A-3FC1-B5F4-CE7C0E7581B5}"/>
               </a:ext>
             </a:extLst>
           </p:cNvPr>
@@ -3714,7 +3714,7 @@
           <p:cNvPr id="4" name="テキスト ボックス 3">
             <a:extLst>
               <a:ext uri="{FF2B5EF4-FFF2-40B4-BE49-F238E27FC236}">
-                <a16:creationId xmlns:a16="http://schemas.microsoft.com/office/drawing/2014/main" id="{C6EDA01B-77DA-9EE7-A343-B273811D2669}"/>
+                <a16:creationId xmlns:a16="http://schemas.microsoft.com/office/drawing/2014/main" id="{B7E2F9F5-9776-FA13-7984-D7A37947785A}"/>
               </a:ext>
             </a:extLst>
           </p:cNvPr>
@@ -3754,7 +3754,7 @@
           <p:cNvPr id="5" name="テキスト ボックス 4">
             <a:extLst>
               <a:ext uri="{FF2B5EF4-FFF2-40B4-BE49-F238E27FC236}">
-                <a16:creationId xmlns:a16="http://schemas.microsoft.com/office/drawing/2014/main" id="{FACD9A2C-FCA7-7F00-C7FA-4292F653AADE}"/>
+                <a16:creationId xmlns:a16="http://schemas.microsoft.com/office/drawing/2014/main" id="{E1C4BCF8-AFAC-6886-9EE3-9981EC5C738E}"/>
               </a:ext>
             </a:extLst>
           </p:cNvPr>
@@ -3801,7 +3801,7 @@
             <a:hlinkClick r:id="" action="ppaction://media"/>
             <a:extLst>
               <a:ext uri="{FF2B5EF4-FFF2-40B4-BE49-F238E27FC236}">
-                <a16:creationId xmlns:a16="http://schemas.microsoft.com/office/drawing/2014/main" id="{DD74426E-F252-EDB2-F424-91D51735BC1F}"/>
+                <a16:creationId xmlns:a16="http://schemas.microsoft.com/office/drawing/2014/main" id="{4625AA22-BAC0-D263-1B53-676D2FD1BBFE}"/>
               </a:ext>
             </a:extLst>
           </p:cNvPr>
@@ -3836,7 +3836,7 @@
     </p:spTree>
     <p:extLst>
       <p:ext uri="{BB962C8B-B14F-4D97-AF65-F5344CB8AC3E}">
-        <p14:creationId xmlns:p14="http://schemas.microsoft.com/office/powerpoint/2010/main" val="4202335497"/>
+        <p14:creationId xmlns:p14="http://schemas.microsoft.com/office/powerpoint/2010/main" val="3670344515"/>
       </p:ext>
     </p:extLst>
   </p:cSld>
@@ -3960,7 +3960,7 @@
           <p:cNvPr id="2" name="テキスト ボックス 1">
             <a:extLst>
               <a:ext uri="{FF2B5EF4-FFF2-40B4-BE49-F238E27FC236}">
-                <a16:creationId xmlns:a16="http://schemas.microsoft.com/office/drawing/2014/main" id="{21B6815A-4407-21DB-81BA-19E110EE0B5C}"/>
+                <a16:creationId xmlns:a16="http://schemas.microsoft.com/office/drawing/2014/main" id="{A0A654DA-DECD-DBFF-28F9-92982647F09A}"/>
               </a:ext>
             </a:extLst>
           </p:cNvPr>
@@ -4006,7 +4006,7 @@
           <p:cNvPr id="3" name="テキスト ボックス 2">
             <a:extLst>
               <a:ext uri="{FF2B5EF4-FFF2-40B4-BE49-F238E27FC236}">
-                <a16:creationId xmlns:a16="http://schemas.microsoft.com/office/drawing/2014/main" id="{CA08375C-F679-F7F9-2952-E3D741EFDCA7}"/>
+                <a16:creationId xmlns:a16="http://schemas.microsoft.com/office/drawing/2014/main" id="{C328625C-F1A7-05D5-112A-8A886C91F22D}"/>
               </a:ext>
             </a:extLst>
           </p:cNvPr>
@@ -4046,7 +4046,7 @@
           <p:cNvPr id="4" name="テキスト ボックス 3">
             <a:extLst>
               <a:ext uri="{FF2B5EF4-FFF2-40B4-BE49-F238E27FC236}">
-                <a16:creationId xmlns:a16="http://schemas.microsoft.com/office/drawing/2014/main" id="{33C2E46B-4131-8F4F-E0D0-B11AA0712D45}"/>
+                <a16:creationId xmlns:a16="http://schemas.microsoft.com/office/drawing/2014/main" id="{5130BD0F-E263-ACF9-F7F8-384B5E4608CE}"/>
               </a:ext>
             </a:extLst>
           </p:cNvPr>
@@ -4113,7 +4113,7 @@
           <p:cNvPr id="5" name="テキスト ボックス 4">
             <a:extLst>
               <a:ext uri="{FF2B5EF4-FFF2-40B4-BE49-F238E27FC236}">
-                <a16:creationId xmlns:a16="http://schemas.microsoft.com/office/drawing/2014/main" id="{6335B269-57D8-1736-6C6E-BDC0ABEF7B16}"/>
+                <a16:creationId xmlns:a16="http://schemas.microsoft.com/office/drawing/2014/main" id="{439C6563-2EA7-3DBD-8538-29A8A6E817E3}"/>
               </a:ext>
             </a:extLst>
           </p:cNvPr>
@@ -4160,7 +4160,7 @@
             <a:hlinkClick r:id="" action="ppaction://media"/>
             <a:extLst>
               <a:ext uri="{FF2B5EF4-FFF2-40B4-BE49-F238E27FC236}">
-                <a16:creationId xmlns:a16="http://schemas.microsoft.com/office/drawing/2014/main" id="{008128FC-D002-C42F-5EC4-BD99B6D6E62A}"/>
+                <a16:creationId xmlns:a16="http://schemas.microsoft.com/office/drawing/2014/main" id="{42DACFDA-E5DC-422A-8820-627799515717}"/>
               </a:ext>
             </a:extLst>
           </p:cNvPr>
@@ -4195,7 +4195,7 @@
     </p:spTree>
     <p:extLst>
       <p:ext uri="{BB962C8B-B14F-4D97-AF65-F5344CB8AC3E}">
-        <p14:creationId xmlns:p14="http://schemas.microsoft.com/office/powerpoint/2010/main" val="3409029924"/>
+        <p14:creationId xmlns:p14="http://schemas.microsoft.com/office/powerpoint/2010/main" val="4132143502"/>
       </p:ext>
     </p:extLst>
   </p:cSld>
@@ -4319,7 +4319,7 @@
           <p:cNvPr id="2" name="テキスト ボックス 1">
             <a:extLst>
               <a:ext uri="{FF2B5EF4-FFF2-40B4-BE49-F238E27FC236}">
-                <a16:creationId xmlns:a16="http://schemas.microsoft.com/office/drawing/2014/main" id="{BB75D1C4-16DD-180F-0136-2D5DFE12D8BE}"/>
+                <a16:creationId xmlns:a16="http://schemas.microsoft.com/office/drawing/2014/main" id="{573CBA46-159D-CDF7-9DD5-132DE25F541E}"/>
               </a:ext>
             </a:extLst>
           </p:cNvPr>
@@ -4365,7 +4365,7 @@
           <p:cNvPr id="3" name="テキスト ボックス 2">
             <a:extLst>
               <a:ext uri="{FF2B5EF4-FFF2-40B4-BE49-F238E27FC236}">
-                <a16:creationId xmlns:a16="http://schemas.microsoft.com/office/drawing/2014/main" id="{D0A6AAD6-2F74-2E2B-52DA-9F6355A0AAD0}"/>
+                <a16:creationId xmlns:a16="http://schemas.microsoft.com/office/drawing/2014/main" id="{200B5EBD-000D-0BCE-EC8A-916EB5EA5262}"/>
               </a:ext>
             </a:extLst>
           </p:cNvPr>
@@ -4405,7 +4405,7 @@
           <p:cNvPr id="4" name="テキスト ボックス 3">
             <a:extLst>
               <a:ext uri="{FF2B5EF4-FFF2-40B4-BE49-F238E27FC236}">
-                <a16:creationId xmlns:a16="http://schemas.microsoft.com/office/drawing/2014/main" id="{50F689ED-794C-2AAD-AF35-11911A498259}"/>
+                <a16:creationId xmlns:a16="http://schemas.microsoft.com/office/drawing/2014/main" id="{A3097894-B868-D221-87DD-3EE413AAF2BE}"/>
               </a:ext>
             </a:extLst>
           </p:cNvPr>
@@ -4500,7 +4500,7 @@
           <p:cNvPr id="5" name="テキスト ボックス 4">
             <a:extLst>
               <a:ext uri="{FF2B5EF4-FFF2-40B4-BE49-F238E27FC236}">
-                <a16:creationId xmlns:a16="http://schemas.microsoft.com/office/drawing/2014/main" id="{DE309513-4F59-35C3-7478-4FFE9197F200}"/>
+                <a16:creationId xmlns:a16="http://schemas.microsoft.com/office/drawing/2014/main" id="{680F7D44-486C-3EF8-63A2-FE505FB23F58}"/>
               </a:ext>
             </a:extLst>
           </p:cNvPr>
@@ -4547,7 +4547,7 @@
             <a:hlinkClick r:id="" action="ppaction://media"/>
             <a:extLst>
               <a:ext uri="{FF2B5EF4-FFF2-40B4-BE49-F238E27FC236}">
-                <a16:creationId xmlns:a16="http://schemas.microsoft.com/office/drawing/2014/main" id="{8024EFCB-5272-5441-E934-73324DE5A84D}"/>
+                <a16:creationId xmlns:a16="http://schemas.microsoft.com/office/drawing/2014/main" id="{52681FF3-BC65-FDA6-7E84-2C2908BCE08B}"/>
               </a:ext>
             </a:extLst>
           </p:cNvPr>
@@ -4582,7 +4582,7 @@
     </p:spTree>
     <p:extLst>
       <p:ext uri="{BB962C8B-B14F-4D97-AF65-F5344CB8AC3E}">
-        <p14:creationId xmlns:p14="http://schemas.microsoft.com/office/powerpoint/2010/main" val="3376793804"/>
+        <p14:creationId xmlns:p14="http://schemas.microsoft.com/office/powerpoint/2010/main" val="2578825442"/>
       </p:ext>
     </p:extLst>
   </p:cSld>
@@ -4706,7 +4706,7 @@
           <p:cNvPr id="2" name="テキスト ボックス 1">
             <a:extLst>
               <a:ext uri="{FF2B5EF4-FFF2-40B4-BE49-F238E27FC236}">
-                <a16:creationId xmlns:a16="http://schemas.microsoft.com/office/drawing/2014/main" id="{AA285E7A-55F8-93AA-6E43-58B6B3EB095F}"/>
+                <a16:creationId xmlns:a16="http://schemas.microsoft.com/office/drawing/2014/main" id="{8E9DB305-CB41-AA7E-7B1F-49082B75AC92}"/>
               </a:ext>
             </a:extLst>
           </p:cNvPr>
@@ -4752,7 +4752,7 @@
           <p:cNvPr id="3" name="テキスト ボックス 2">
             <a:extLst>
               <a:ext uri="{FF2B5EF4-FFF2-40B4-BE49-F238E27FC236}">
-                <a16:creationId xmlns:a16="http://schemas.microsoft.com/office/drawing/2014/main" id="{8BCB8308-2473-1B96-E5C6-2BF7001AD8FE}"/>
+                <a16:creationId xmlns:a16="http://schemas.microsoft.com/office/drawing/2014/main" id="{69E802CE-D833-2DAF-E6FD-EB40CD27943C}"/>
               </a:ext>
             </a:extLst>
           </p:cNvPr>
@@ -4792,7 +4792,7 @@
           <p:cNvPr id="4" name="テキスト ボックス 3">
             <a:extLst>
               <a:ext uri="{FF2B5EF4-FFF2-40B4-BE49-F238E27FC236}">
-                <a16:creationId xmlns:a16="http://schemas.microsoft.com/office/drawing/2014/main" id="{10181E05-3F6C-AD87-2757-77842312BD6C}"/>
+                <a16:creationId xmlns:a16="http://schemas.microsoft.com/office/drawing/2014/main" id="{97598049-D0DA-F0DD-874A-66651849E9A3}"/>
               </a:ext>
             </a:extLst>
           </p:cNvPr>
@@ -4902,7 +4902,7 @@
           <p:cNvPr id="5" name="テキスト ボックス 4">
             <a:extLst>
               <a:ext uri="{FF2B5EF4-FFF2-40B4-BE49-F238E27FC236}">
-                <a16:creationId xmlns:a16="http://schemas.microsoft.com/office/drawing/2014/main" id="{07A94D3D-9BEB-77AB-572F-2602CE86BF48}"/>
+                <a16:creationId xmlns:a16="http://schemas.microsoft.com/office/drawing/2014/main" id="{EA6B9811-48E2-FF0E-C55E-72551F3F044A}"/>
               </a:ext>
             </a:extLst>
           </p:cNvPr>
@@ -4949,7 +4949,7 @@
             <a:hlinkClick r:id="" action="ppaction://media"/>
             <a:extLst>
               <a:ext uri="{FF2B5EF4-FFF2-40B4-BE49-F238E27FC236}">
-                <a16:creationId xmlns:a16="http://schemas.microsoft.com/office/drawing/2014/main" id="{BFA7C5DB-9D51-D81F-8B7E-F20EAA682722}"/>
+                <a16:creationId xmlns:a16="http://schemas.microsoft.com/office/drawing/2014/main" id="{9FC297CA-4643-4C02-49F3-970A41DF1078}"/>
               </a:ext>
             </a:extLst>
           </p:cNvPr>
@@ -4984,7 +4984,7 @@
     </p:spTree>
     <p:extLst>
       <p:ext uri="{BB962C8B-B14F-4D97-AF65-F5344CB8AC3E}">
-        <p14:creationId xmlns:p14="http://schemas.microsoft.com/office/powerpoint/2010/main" val="3450758539"/>
+        <p14:creationId xmlns:p14="http://schemas.microsoft.com/office/powerpoint/2010/main" val="4103365961"/>
       </p:ext>
     </p:extLst>
   </p:cSld>
@@ -5108,7 +5108,7 @@
           <p:cNvPr id="2" name="テキスト ボックス 1">
             <a:extLst>
               <a:ext uri="{FF2B5EF4-FFF2-40B4-BE49-F238E27FC236}">
-                <a16:creationId xmlns:a16="http://schemas.microsoft.com/office/drawing/2014/main" id="{0E6DC779-9784-DAC6-5987-BABF889E4746}"/>
+                <a16:creationId xmlns:a16="http://schemas.microsoft.com/office/drawing/2014/main" id="{99C99E77-A4FB-C058-053E-73CD46893BEC}"/>
               </a:ext>
             </a:extLst>
           </p:cNvPr>
@@ -5154,7 +5154,7 @@
           <p:cNvPr id="3" name="テキスト ボックス 2">
             <a:extLst>
               <a:ext uri="{FF2B5EF4-FFF2-40B4-BE49-F238E27FC236}">
-                <a16:creationId xmlns:a16="http://schemas.microsoft.com/office/drawing/2014/main" id="{5FBE3AF1-C310-EC23-2DAD-61EBE151800A}"/>
+                <a16:creationId xmlns:a16="http://schemas.microsoft.com/office/drawing/2014/main" id="{321F6385-EA6E-B778-1297-4708A2AF6B95}"/>
               </a:ext>
             </a:extLst>
           </p:cNvPr>
@@ -5194,7 +5194,7 @@
           <p:cNvPr id="4" name="テキスト ボックス 3">
             <a:extLst>
               <a:ext uri="{FF2B5EF4-FFF2-40B4-BE49-F238E27FC236}">
-                <a16:creationId xmlns:a16="http://schemas.microsoft.com/office/drawing/2014/main" id="{3C4EC795-AC96-C0D7-ABAA-02F0220C1198}"/>
+                <a16:creationId xmlns:a16="http://schemas.microsoft.com/office/drawing/2014/main" id="{6614FE00-2D6E-5237-AD4E-1FA4C61E9B77}"/>
               </a:ext>
             </a:extLst>
           </p:cNvPr>
@@ -5218,20 +5218,14 @@
           <a:lstStyle/>
           <a:p>
             <a:r>
-              <a:rPr kumimoji="1" lang="en-US" altLang="ja-JP" sz="2000">
+              <a:rPr kumimoji="1" lang="ja-JP" altLang="en-US" sz="2000">
                 <a:solidFill>
                   <a:srgbClr val="333333"/>
                 </a:solidFill>
                 <a:latin typeface="Arial" panose="020B0604020202020204" pitchFamily="34" charset="0"/>
               </a:rPr>
-              <a:t>Set localboard domain</a:t>
-            </a:r>
-            <a:endParaRPr kumimoji="1" lang="ja-JP" altLang="en-US" sz="2000">
-              <a:solidFill>
-                <a:srgbClr val="333333"/>
-              </a:solidFill>
-              <a:latin typeface="Arial" panose="020B0604020202020204" pitchFamily="34" charset="0"/>
-            </a:endParaRPr>
+              <a:t>直近のコミットでは、実装の見直しと継続的な改善が行われました。</a:t>
+            </a:r>
           </a:p>
         </p:txBody>
       </p:sp>
@@ -5240,7 +5234,7 @@
           <p:cNvPr id="5" name="テキスト ボックス 4">
             <a:extLst>
               <a:ext uri="{FF2B5EF4-FFF2-40B4-BE49-F238E27FC236}">
-                <a16:creationId xmlns:a16="http://schemas.microsoft.com/office/drawing/2014/main" id="{6AE4FFC9-8EF9-1093-A341-028BBC88774D}"/>
+                <a16:creationId xmlns:a16="http://schemas.microsoft.com/office/drawing/2014/main" id="{9C21C815-B659-49EE-A416-1FBB0AC40CCD}"/>
               </a:ext>
             </a:extLst>
           </p:cNvPr>
@@ -5287,7 +5281,7 @@
             <a:hlinkClick r:id="" action="ppaction://media"/>
             <a:extLst>
               <a:ext uri="{FF2B5EF4-FFF2-40B4-BE49-F238E27FC236}">
-                <a16:creationId xmlns:a16="http://schemas.microsoft.com/office/drawing/2014/main" id="{CAF2A06D-696B-0ACB-7884-49153C75BE53}"/>
+                <a16:creationId xmlns:a16="http://schemas.microsoft.com/office/drawing/2014/main" id="{60729104-5F30-86FD-5A6B-E55630B70248}"/>
               </a:ext>
             </a:extLst>
           </p:cNvPr>
@@ -5322,7 +5316,7 @@
     </p:spTree>
     <p:extLst>
       <p:ext uri="{BB962C8B-B14F-4D97-AF65-F5344CB8AC3E}">
-        <p14:creationId xmlns:p14="http://schemas.microsoft.com/office/powerpoint/2010/main" val="3837305092"/>
+        <p14:creationId xmlns:p14="http://schemas.microsoft.com/office/powerpoint/2010/main" val="41495756"/>
       </p:ext>
     </p:extLst>
   </p:cSld>
@@ -5365,7 +5359,7 @@
                                   <p:childTnLst>
                                     <p:cmd type="call" cmd="playFrom(0.0)">
                                       <p:cBhvr>
-                                        <p:cTn id="6" dur="6002" fill="hold"/>
+                                        <p:cTn id="6" dur="6076" fill="hold"/>
                                         <p:tgtEl>
                                           <p:spTgt spid="6"/>
                                         </p:tgtEl>
@@ -5446,7 +5440,7 @@
           <p:cNvPr id="2" name="テキスト ボックス 1">
             <a:extLst>
               <a:ext uri="{FF2B5EF4-FFF2-40B4-BE49-F238E27FC236}">
-                <a16:creationId xmlns:a16="http://schemas.microsoft.com/office/drawing/2014/main" id="{2B5BD0CD-9DBF-7A27-C669-A63BD125D741}"/>
+                <a16:creationId xmlns:a16="http://schemas.microsoft.com/office/drawing/2014/main" id="{2EAD897A-D014-A86A-418B-38E15385A4D7}"/>
               </a:ext>
             </a:extLst>
           </p:cNvPr>
@@ -5492,7 +5486,7 @@
           <p:cNvPr id="3" name="テキスト ボックス 2">
             <a:extLst>
               <a:ext uri="{FF2B5EF4-FFF2-40B4-BE49-F238E27FC236}">
-                <a16:creationId xmlns:a16="http://schemas.microsoft.com/office/drawing/2014/main" id="{46BE3F93-ABB6-D9C7-E7B9-F88B299679D9}"/>
+                <a16:creationId xmlns:a16="http://schemas.microsoft.com/office/drawing/2014/main" id="{2FD3DC2D-B64D-80DE-7AFF-E94AC9FC2BCA}"/>
               </a:ext>
             </a:extLst>
           </p:cNvPr>
@@ -5532,7 +5526,7 @@
           <p:cNvPr id="4" name="テキスト ボックス 3">
             <a:extLst>
               <a:ext uri="{FF2B5EF4-FFF2-40B4-BE49-F238E27FC236}">
-                <a16:creationId xmlns:a16="http://schemas.microsoft.com/office/drawing/2014/main" id="{DBD80FC4-1B85-D65C-D88C-99036BFFD427}"/>
+                <a16:creationId xmlns:a16="http://schemas.microsoft.com/office/drawing/2014/main" id="{5C78F62C-9722-3051-AABF-073AD0CDFB2C}"/>
               </a:ext>
             </a:extLst>
           </p:cNvPr>
@@ -5597,7 +5591,7 @@
           <p:cNvPr id="5" name="テキスト ボックス 4">
             <a:extLst>
               <a:ext uri="{FF2B5EF4-FFF2-40B4-BE49-F238E27FC236}">
-                <a16:creationId xmlns:a16="http://schemas.microsoft.com/office/drawing/2014/main" id="{ED2FC4F6-A92C-0C99-5F4A-F998910A81BF}"/>
+                <a16:creationId xmlns:a16="http://schemas.microsoft.com/office/drawing/2014/main" id="{9930B7FA-0303-DAD4-3749-60CFE6AA58DE}"/>
               </a:ext>
             </a:extLst>
           </p:cNvPr>
@@ -5644,7 +5638,7 @@
             <a:hlinkClick r:id="" action="ppaction://media"/>
             <a:extLst>
               <a:ext uri="{FF2B5EF4-FFF2-40B4-BE49-F238E27FC236}">
-                <a16:creationId xmlns:a16="http://schemas.microsoft.com/office/drawing/2014/main" id="{8A249D1C-1D93-79A6-8FDA-76725BB5128A}"/>
+                <a16:creationId xmlns:a16="http://schemas.microsoft.com/office/drawing/2014/main" id="{3500A2C8-949F-9871-A722-207005DA1D0C}"/>
               </a:ext>
             </a:extLst>
           </p:cNvPr>
@@ -5679,7 +5673,7 @@
     </p:spTree>
     <p:extLst>
       <p:ext uri="{BB962C8B-B14F-4D97-AF65-F5344CB8AC3E}">
-        <p14:creationId xmlns:p14="http://schemas.microsoft.com/office/powerpoint/2010/main" val="1719790905"/>
+        <p14:creationId xmlns:p14="http://schemas.microsoft.com/office/powerpoint/2010/main" val="453168667"/>
       </p:ext>
     </p:extLst>
   </p:cSld>
